--- a/images/site-logo/Logo.pptx
+++ b/images/site-logo/Logo.pptx
@@ -3103,8 +3103,8 @@
         </p:nvSpPr>
         <p:spPr>
           <a:xfrm>
-            <a:off x="3394895" y="1316829"/>
-            <a:ext cx="1675233" cy="3770263"/>
+            <a:off x="235507" y="650779"/>
+            <a:ext cx="8458666" cy="5201424"/>
           </a:xfrm>
           <a:prstGeom prst="rect">
             <a:avLst/>
@@ -3116,14 +3116,46 @@
           </a:bodyPr>
           <a:lstStyle/>
           <a:p>
-            <a:r>
-              <a:rPr lang="en-US" sz="23900" b="1" i="0" dirty="0" err="1" smtClean="0">
+            <a:pPr algn="ctr"/>
+            <a:r>
+              <a:rPr lang="en-US" sz="16600" b="1" dirty="0">
+                <a:ea typeface="Lucida Grande"/>
+                <a:cs typeface="Lucida Grande"/>
+              </a:rPr>
+              <a:t>d</a:t>
+            </a:r>
+            <a:r>
+              <a:rPr lang="en-US" sz="16600" b="1" dirty="0" smtClean="0">
+                <a:ea typeface="Lucida Grande"/>
+                <a:cs typeface="Lucida Grande"/>
+              </a:rPr>
+              <a:t>α</a:t>
+            </a:r>
+            <a:r>
+              <a:rPr lang="en-US" sz="16600" b="1" dirty="0" smtClean="0">
                 <a:ea typeface="Lucida Grande"/>
                 <a:cs typeface="Apple Chancery"/>
               </a:rPr>
-              <a:t>λ</a:t>
-            </a:r>
-            <a:endParaRPr lang="en-US" sz="23900" dirty="0">
+              <a:t>ta</a:t>
+            </a:r>
+          </a:p>
+          <a:p>
+            <a:pPr algn="ctr"/>
+            <a:r>
+              <a:rPr lang="en-US" sz="16600" b="1" dirty="0" err="1" smtClean="0">
+                <a:ea typeface="Lucida Grande"/>
+                <a:cs typeface="Apple Chancery"/>
+              </a:rPr>
+              <a:t>ana</a:t>
+            </a:r>
+            <a:r>
+              <a:rPr lang="en-US" sz="16600" b="1" i="0" dirty="0" err="1" smtClean="0">
+                <a:ea typeface="Lucida Grande"/>
+                <a:cs typeface="Apple Chancery"/>
+              </a:rPr>
+              <a:t>λytics</a:t>
+            </a:r>
+            <a:endParaRPr lang="en-US" sz="16600" dirty="0">
               <a:cs typeface="Apple Chancery"/>
             </a:endParaRPr>
           </a:p>

--- a/images/site-logo/Logo.pptx
+++ b/images/site-logo/Logo.pptx
@@ -3103,8 +3103,8 @@
         </p:nvSpPr>
         <p:spPr>
           <a:xfrm>
-            <a:off x="235507" y="650779"/>
-            <a:ext cx="8458666" cy="5201424"/>
+            <a:off x="343926" y="1549171"/>
+            <a:ext cx="8458666" cy="3796424"/>
           </a:xfrm>
           <a:prstGeom prst="rect">
             <a:avLst/>
@@ -3116,7 +3116,11 @@
           </a:bodyPr>
           <a:lstStyle/>
           <a:p>
-            <a:pPr algn="ctr"/>
+            <a:pPr algn="ctr">
+              <a:lnSpc>
+                <a:spcPct val="70000"/>
+              </a:lnSpc>
+            </a:pPr>
             <a:r>
               <a:rPr lang="en-US" sz="16600" b="1" dirty="0">
                 <a:ea typeface="Lucida Grande"/>
@@ -3140,7 +3144,11 @@
             </a:r>
           </a:p>
           <a:p>
-            <a:pPr algn="ctr"/>
+            <a:pPr algn="ctr">
+              <a:lnSpc>
+                <a:spcPct val="70000"/>
+              </a:lnSpc>
+            </a:pPr>
             <a:r>
               <a:rPr lang="en-US" sz="16600" b="1" dirty="0" err="1" smtClean="0">
                 <a:ea typeface="Lucida Grande"/>
